--- a/在你手中(崇拜版).pptx
+++ b/在你手中(崇拜版).pptx
@@ -301,7 +301,7 @@
           <a:p>
             <a:fld id="{2D9B7FE6-3ED8-4A43-BCFB-5BDAAFD58BF9}" type="datetimeFigureOut">
               <a:rPr lang="vi-VN" smtClean="0"/>
-              <a:t>01/10/2022</a:t>
+              <a:t>23/07/2025</a:t>
             </a:fld>
             <a:endParaRPr lang="vi-VN"/>
           </a:p>
@@ -471,7 +471,7 @@
           <a:p>
             <a:fld id="{2D9B7FE6-3ED8-4A43-BCFB-5BDAAFD58BF9}" type="datetimeFigureOut">
               <a:rPr lang="vi-VN" smtClean="0"/>
-              <a:t>01/10/2022</a:t>
+              <a:t>23/07/2025</a:t>
             </a:fld>
             <a:endParaRPr lang="vi-VN"/>
           </a:p>
@@ -651,7 +651,7 @@
           <a:p>
             <a:fld id="{2D9B7FE6-3ED8-4A43-BCFB-5BDAAFD58BF9}" type="datetimeFigureOut">
               <a:rPr lang="vi-VN" smtClean="0"/>
-              <a:t>01/10/2022</a:t>
+              <a:t>23/07/2025</a:t>
             </a:fld>
             <a:endParaRPr lang="vi-VN"/>
           </a:p>
@@ -821,7 +821,7 @@
           <a:p>
             <a:fld id="{2D9B7FE6-3ED8-4A43-BCFB-5BDAAFD58BF9}" type="datetimeFigureOut">
               <a:rPr lang="vi-VN" smtClean="0"/>
-              <a:t>01/10/2022</a:t>
+              <a:t>23/07/2025</a:t>
             </a:fld>
             <a:endParaRPr lang="vi-VN"/>
           </a:p>
@@ -1067,7 +1067,7 @@
           <a:p>
             <a:fld id="{2D9B7FE6-3ED8-4A43-BCFB-5BDAAFD58BF9}" type="datetimeFigureOut">
               <a:rPr lang="vi-VN" smtClean="0"/>
-              <a:t>01/10/2022</a:t>
+              <a:t>23/07/2025</a:t>
             </a:fld>
             <a:endParaRPr lang="vi-VN"/>
           </a:p>
@@ -1355,7 +1355,7 @@
           <a:p>
             <a:fld id="{2D9B7FE6-3ED8-4A43-BCFB-5BDAAFD58BF9}" type="datetimeFigureOut">
               <a:rPr lang="vi-VN" smtClean="0"/>
-              <a:t>01/10/2022</a:t>
+              <a:t>23/07/2025</a:t>
             </a:fld>
             <a:endParaRPr lang="vi-VN"/>
           </a:p>
@@ -1777,7 +1777,7 @@
           <a:p>
             <a:fld id="{2D9B7FE6-3ED8-4A43-BCFB-5BDAAFD58BF9}" type="datetimeFigureOut">
               <a:rPr lang="vi-VN" smtClean="0"/>
-              <a:t>01/10/2022</a:t>
+              <a:t>23/07/2025</a:t>
             </a:fld>
             <a:endParaRPr lang="vi-VN"/>
           </a:p>
@@ -1895,7 +1895,7 @@
           <a:p>
             <a:fld id="{2D9B7FE6-3ED8-4A43-BCFB-5BDAAFD58BF9}" type="datetimeFigureOut">
               <a:rPr lang="vi-VN" smtClean="0"/>
-              <a:t>01/10/2022</a:t>
+              <a:t>23/07/2025</a:t>
             </a:fld>
             <a:endParaRPr lang="vi-VN"/>
           </a:p>
@@ -1990,7 +1990,7 @@
           <a:p>
             <a:fld id="{2D9B7FE6-3ED8-4A43-BCFB-5BDAAFD58BF9}" type="datetimeFigureOut">
               <a:rPr lang="vi-VN" smtClean="0"/>
-              <a:t>01/10/2022</a:t>
+              <a:t>23/07/2025</a:t>
             </a:fld>
             <a:endParaRPr lang="vi-VN"/>
           </a:p>
@@ -2267,7 +2267,7 @@
           <a:p>
             <a:fld id="{2D9B7FE6-3ED8-4A43-BCFB-5BDAAFD58BF9}" type="datetimeFigureOut">
               <a:rPr lang="vi-VN" smtClean="0"/>
-              <a:t>01/10/2022</a:t>
+              <a:t>23/07/2025</a:t>
             </a:fld>
             <a:endParaRPr lang="vi-VN"/>
           </a:p>
@@ -2524,7 +2524,7 @@
           <a:p>
             <a:fld id="{2D9B7FE6-3ED8-4A43-BCFB-5BDAAFD58BF9}" type="datetimeFigureOut">
               <a:rPr lang="vi-VN" smtClean="0"/>
-              <a:t>01/10/2022</a:t>
+              <a:t>23/07/2025</a:t>
             </a:fld>
             <a:endParaRPr lang="vi-VN"/>
           </a:p>
@@ -2742,7 +2742,7 @@
           <a:p>
             <a:fld id="{2D9B7FE6-3ED8-4A43-BCFB-5BDAAFD58BF9}" type="datetimeFigureOut">
               <a:rPr lang="vi-VN" smtClean="0"/>
-              <a:t>01/10/2022</a:t>
+              <a:t>23/07/2025</a:t>
             </a:fld>
             <a:endParaRPr lang="vi-VN"/>
           </a:p>
@@ -3154,7 +3154,24 @@
                 <a:latin typeface="微軟正黑體" pitchFamily="34" charset="-120"/>
                 <a:ea typeface="微軟正黑體" pitchFamily="34" charset="-120"/>
               </a:rPr>
-              <a:t>在袮手中</a:t>
+              <a:t>在祢手</a:t>
+            </a:r>
+            <a:r>
+              <a:rPr lang="zh-CN" altLang="en-US" sz="7200" b="1" i="1" dirty="0">
+                <a:solidFill>
+                  <a:srgbClr val="660033"/>
+                </a:solidFill>
+                <a:effectLst>
+                  <a:outerShdw blurRad="38100" dist="38100" dir="2700000" algn="tl">
+                    <a:srgbClr val="000000">
+                      <a:alpha val="43137"/>
+                    </a:srgbClr>
+                  </a:outerShdw>
+                </a:effectLst>
+                <a:latin typeface="微軟正黑體" pitchFamily="34" charset="-120"/>
+                <a:ea typeface="微軟正黑體" pitchFamily="34" charset="-120"/>
+              </a:rPr>
+              <a:t>中</a:t>
             </a:r>
             <a:endParaRPr lang="zh-TW" altLang="en-US" sz="7200" b="1" i="1" dirty="0">
               <a:solidFill>
@@ -3957,17 +3974,7 @@
                 <a:latin typeface="Microsoft JhengHei" panose="020B0604030504040204" pitchFamily="34" charset="-120"/>
                 <a:ea typeface="Microsoft JhengHei" panose="020B0604030504040204" pitchFamily="34" charset="-120"/>
               </a:rPr>
-              <a:t> </a:t>
-            </a:r>
-            <a:r>
-              <a:rPr lang="en-US" sz="4400" b="1" dirty="0" smtClean="0">
-                <a:solidFill>
-                  <a:srgbClr val="660033"/>
-                </a:solidFill>
-                <a:latin typeface="Microsoft JhengHei" panose="020B0604030504040204" pitchFamily="34" charset="-120"/>
-                <a:ea typeface="Microsoft JhengHei" panose="020B0604030504040204" pitchFamily="34" charset="-120"/>
-              </a:rPr>
-              <a:t>)</a:t>
+              <a:t> )</a:t>
             </a:r>
             <a:endParaRPr lang="vi-VN" sz="4400" b="1" dirty="0">
               <a:solidFill>
@@ -4126,17 +4133,7 @@
                 <a:latin typeface="Microsoft JhengHei" panose="020B0604030504040204" pitchFamily="34" charset="-120"/>
                 <a:ea typeface="Microsoft JhengHei" panose="020B0604030504040204" pitchFamily="34" charset="-120"/>
               </a:rPr>
-              <a:t> </a:t>
-            </a:r>
-            <a:r>
-              <a:rPr lang="en-US" sz="4400" b="1" dirty="0" smtClean="0">
-                <a:solidFill>
-                  <a:srgbClr val="660033"/>
-                </a:solidFill>
-                <a:latin typeface="Microsoft JhengHei" panose="020B0604030504040204" pitchFamily="34" charset="-120"/>
-                <a:ea typeface="Microsoft JhengHei" panose="020B0604030504040204" pitchFamily="34" charset="-120"/>
-              </a:rPr>
-              <a:t>)</a:t>
+              <a:t> )</a:t>
             </a:r>
             <a:endParaRPr lang="vi-VN" sz="4400" b="1" dirty="0">
               <a:solidFill>
@@ -4295,17 +4292,7 @@
                 <a:latin typeface="Microsoft JhengHei" panose="020B0604030504040204" pitchFamily="34" charset="-120"/>
                 <a:ea typeface="Microsoft JhengHei" panose="020B0604030504040204" pitchFamily="34" charset="-120"/>
               </a:rPr>
-              <a:t> </a:t>
-            </a:r>
-            <a:r>
-              <a:rPr lang="en-US" sz="4400" b="1" dirty="0" smtClean="0">
-                <a:solidFill>
-                  <a:srgbClr val="660033"/>
-                </a:solidFill>
-                <a:latin typeface="Microsoft JhengHei" panose="020B0604030504040204" pitchFamily="34" charset="-120"/>
-                <a:ea typeface="Microsoft JhengHei" panose="020B0604030504040204" pitchFamily="34" charset="-120"/>
-              </a:rPr>
-              <a:t>)</a:t>
+              <a:t> )</a:t>
             </a:r>
             <a:endParaRPr lang="vi-VN" sz="4400" b="1" dirty="0">
               <a:solidFill>
@@ -4464,17 +4451,7 @@
                 <a:latin typeface="Microsoft JhengHei" panose="020B0604030504040204" pitchFamily="34" charset="-120"/>
                 <a:ea typeface="Microsoft JhengHei" panose="020B0604030504040204" pitchFamily="34" charset="-120"/>
               </a:rPr>
-              <a:t> </a:t>
-            </a:r>
-            <a:r>
-              <a:rPr lang="en-US" sz="4400" b="1" dirty="0" smtClean="0">
-                <a:solidFill>
-                  <a:srgbClr val="660033"/>
-                </a:solidFill>
-                <a:latin typeface="Microsoft JhengHei" panose="020B0604030504040204" pitchFamily="34" charset="-120"/>
-                <a:ea typeface="Microsoft JhengHei" panose="020B0604030504040204" pitchFamily="34" charset="-120"/>
-              </a:rPr>
-              <a:t>)</a:t>
+              <a:t> )</a:t>
             </a:r>
             <a:endParaRPr lang="vi-VN" sz="4400" b="1" dirty="0">
               <a:solidFill>
